--- a/disciplina-08-indicadores-socioeconomicos/materiais/04_Unidade_4_Indicadores_Economicos_e_Conjuntura.pptx
+++ b/disciplina-08-indicadores-socioeconomicos/materiais/04_Unidade_4_Indicadores_Economicos_e_Conjuntura.pptx
@@ -36,9 +36,10 @@
     <p:sldId id="284" r:id="rId30"/>
     <p:sldId id="285" r:id="rId31"/>
     <p:sldId id="286" r:id="rId32"/>
+    <p:sldId id="287" r:id="rId33"/>
   </p:sldIdLst>
   <p:notesMasterIdLst>
-    <p:notesMasterId r:id="rId33"/>
+    <p:notesMasterId r:id="rId34"/>
   </p:notesMasterIdLst>
   <p:sldSz cx="9144000" cy="5143500"/>
   <p:notesSz cx="5143500" cy="9144000"/>
@@ -2565,7 +2566,7 @@
           <a:p>
             <a:r>
               <a:rPr lang="en-US" dirty="0"/>
-              <a:t/>
+              <a:t>Olá, turma! Chegamos à Unidade 4, a última da disciplina: dados e indicadores econômicos e conjuntura. Até aqui, trabalhamos com indicadores sociais. Agora, vamos entender os principais indicadores da economia, como PIB, inflação, emprego e juros, e como a conjuntura econômica chega ao orçamento do município.</a:t>
             </a:r>
             <a:endParaRPr lang="en-US" dirty="0"/>
           </a:p>
@@ -2653,7 +2654,7 @@
           <a:p>
             <a:r>
               <a:rPr lang="en-US" dirty="0"/>
-              <a:t/>
+              <a:t>Vamos ao mercado de trabalho. Na PNAD Contínua, a força de trabalho reúne os ocupados e os desocupados. Desocupado é quem procurou trabalho e não encontrou. A taxa de desocupação é o número de desocupados dividido pela força de trabalho. E a informalidade reúne os ocupados sem carteira ou sem CNPJ. No município, porém, a PNAD Contínua não traz dados para a maioria das cidades. Por isso, usamos o Novo CAGED, com o saldo mensal de empregos formais, a RAIS, com o estoque anual de vínculos formais, e o Censo 2022, com a situação de trabalho em todos os municípios.</a:t>
             </a:r>
             <a:endParaRPr lang="en-US" dirty="0"/>
           </a:p>
@@ -2741,7 +2742,7 @@
           <a:p>
             <a:r>
               <a:rPr lang="en-US" dirty="0"/>
-              <a:t/>
+              <a:t>O gráfico mostra a desocupação média anual no Brasil. [Acompanhar a linha com o ponteiro.] A recessão levou a taxa de 7%, em 2014, para quase 13%. Houve novo pico na pandemia, em 2020, com 13,8%. E, em 2024, a média foi a menor da série, em torno de 6,6%. Para acompanhar o seu município, complemente com o CAGED e a RAIS.</a:t>
             </a:r>
             <a:endParaRPr lang="en-US" dirty="0"/>
           </a:p>
@@ -2829,7 +2830,7 @@
           <a:p>
             <a:r>
               <a:rPr lang="en-US" dirty="0"/>
-              <a:t/>
+              <a:t>Outros indicadores importantes. A Selic é a taxa básica de juros, definida pelo Copom do Banco Central em oito reuniões por ano. O câmbio, o preço do dólar, afeta os importados, os combustíveis e as exportações do agronegócio. O resultado primário é a diferença entre receitas e despesas, sem os juros, e mostra o esforço fiscal. E, no município, a Lei de Responsabilidade Fiscal limita o gasto com pessoal a 60% da receita corrente líquida: 54% para o Executivo e 6% para o Legislativo.</a:t>
             </a:r>
             <a:endParaRPr lang="en-US" dirty="0"/>
           </a:p>
@@ -2917,7 +2918,7 @@
           <a:p>
             <a:r>
               <a:rPr lang="en-US" dirty="0"/>
-              <a:t/>
+              <a:t>O gráfico mostra a meta da Selic no fim de cada ano. [Apontar para a linha.] Em 2020, a Selic chegou à mínima histórica de 2%. Em 2021 e 2022, subiu fortemente, até 13,75%, para conter a inflação. Juros altos encarecem o crédito e também as dívidas dos entes públicos.</a:t>
             </a:r>
             <a:endParaRPr lang="en-US" dirty="0"/>
           </a:p>
@@ -3005,7 +3006,7 @@
           <a:p>
             <a:r>
               <a:rPr lang="en-US" dirty="0"/>
-              <a:t/>
+              <a:t>Agora, a LRF na prática, com um município hipotético. [Apontar para a linha vermelha e depois para as linhas de limite.] O limite máximo do gasto com pessoal do Executivo é 54% da receita corrente líquida. Acima de 51,3%, o limite prudencial, ficam vedados novos aumentos e contratações, salvo exceções previstas na lei. Este município ultrapassou o limite prudencial em 2023, o que é um alerta para a gestão. Os dados reais estão no Relatório de Gestão Fiscal, no SICONFI.</a:t>
             </a:r>
             <a:endParaRPr lang="en-US" dirty="0"/>
           </a:p>
@@ -3093,7 +3094,7 @@
           <a:p>
             <a:r>
               <a:rPr lang="en-US" dirty="0"/>
-              <a:t/>
+              <a:t>Parte 2, que corresponde ao tópico 8 do sumário: pesquisas econômicas do IBGE e boletins de conjuntura. Acompanhar a economia para planejar melhor.</a:t>
             </a:r>
             <a:endParaRPr lang="en-US" dirty="0"/>
           </a:p>
@@ -3181,7 +3182,7 @@
           <a:p>
             <a:r>
               <a:rPr lang="en-US" dirty="0"/>
-              <a:t/>
+              <a:t>A tabela mostra as principais pesquisas econômicas do IBGE. As Contas Nacionais, trimestrais, trazem o PIB do país e os seus componentes. O PIB dos Municípios, anual, traz o PIB e o valor adicionado por setor em cada município. A PIM-PF, a PMC e a PMS, mensais, acompanham a indústria, o comércio varejista e os serviços. O LSPA, mensal, traz as estimativas das safras. E a PAM e a PPM, anuais, mostram a produção agrícola e pecuária de cada município. Para os municípios agrícolas de Mato Grosso, a PAM e a PPM mostram a base produtiva local, e o LSPA antecipa a safra do estado.</a:t>
             </a:r>
             <a:endParaRPr lang="en-US" dirty="0"/>
           </a:p>
@@ -3269,7 +3270,7 @@
           <a:p>
             <a:r>
               <a:rPr lang="en-US" dirty="0"/>
-              <a:t/>
+              <a:t>Além das pesquisas, há os boletins de conjuntura. O Boletim Focus, do Banco Central, é semanal e traz as expectativas do mercado para inflação, PIB, câmbio e Selic. As atas do Copom e os relatórios do Banco Central explicam as decisões sobre juros e a avaliação da inflação. A Carta de Conjuntura do IPEA, trimestral, analisa a atividade, os preços, o trabalho e o setor externo. E o Boletim Macro, da FGV IBRE, traz análises e projeções da economia brasileira.</a:t>
             </a:r>
             <a:endParaRPr lang="en-US" dirty="0"/>
           </a:p>
@@ -3357,7 +3358,7 @@
           <a:p>
             <a:r>
               <a:rPr lang="en-US" dirty="0"/>
-              <a:t/>
+              <a:t>Como ler a conjuntura? Inspirados em Feijó e colaboradores, propomos cinco passos. Primeiro, a atividade: PIB, indústria, comércio, serviços e safra. Segundo, os preços: o IPCA e os núcleos de inflação. Terceiro, o trabalho: desocupação, CAGED e renda. Quarto, juros e câmbio: Selic, dólar e crédito. E quinto, as contas públicas: resultado primário e dívida. Para o município, a conjuntura afeta a arrecadação, com o ICMS, o FPM e o ISS, e também a procura por serviços públicos.</a:t>
             </a:r>
             <a:endParaRPr lang="en-US" dirty="0"/>
           </a:p>
@@ -3445,7 +3446,7 @@
           <a:p>
             <a:r>
               <a:rPr lang="en-US" dirty="0"/>
-              <a:t/>
+              <a:t>Da conjuntura ao orçamento municipal. Em municípios agrícolas de Mato Grosso, uma safra maior tende a elevar o valor adicionado local e, nos anos seguintes, a participação do município na cota-parte do ICMS. Já uma desaceleração da economia reduz transferências e aumenta a procura por assistência social. Por isso, o gestor deve acompanhar três frentes: as receitas, como ICMS, FPM e ISS, em termos reais; as despesas, com contratos reajustados por índices de preços, a folha e a LRF; e as demandas, porque o desemprego eleva a procura pelo SUS, pelo CRAS e pelo CadÚnico.</a:t>
             </a:r>
             <a:endParaRPr lang="en-US" dirty="0"/>
           </a:p>
@@ -3533,7 +3534,7 @@
           <a:p>
             <a:r>
               <a:rPr lang="en-US" dirty="0"/>
-              <a:t/>
+              <a:t>Esta é a quarta semana da disciplina, com as datas no SIGAA. A leitura é o livro de Jannuzzi e o texto de Feijó e colaboradores, Para entender a conjuntura econômica, de 2008, junto com os tópicos 7 e 8 do sumário da página de conteúdos. Nesta semana, você faz os Exercícios de fixação 2 e a Avaliação A2.</a:t>
             </a:r>
             <a:endParaRPr lang="en-US" dirty="0"/>
           </a:p>
@@ -3621,7 +3622,7 @@
           <a:p>
             <a:r>
               <a:rPr lang="en-US" dirty="0"/>
-              <a:t/>
+              <a:t>Vamos às atividades finais, com as datas no SIGAA. Nesta semana, assista a esta videoaula e faça a leitura. Depois, faça os Exercícios de fixação 2 e a Avaliação A2, sobre as Unidades 3 e 4, até as 23h55. Na semana seguinte, faça a revisão com a gravação do encontro síncrono e a A3: dez questões objetivas e um estudo de caso, sobre todo o conteúdo. Lembre que a nota final é a média de A1 e A2 com peso 0,4, mais a A3 com peso 0,6, e que a aprovação exige nota 7,0.</a:t>
             </a:r>
             <a:endParaRPr lang="en-US" dirty="0"/>
           </a:p>
@@ -3709,7 +3710,7 @@
           <a:p>
             <a:r>
               <a:rPr lang="en-US" dirty="0"/>
-              <a:t/>
+              <a:t>Para encerrar, o último quiz: cinco perguntas sobre a Unidade 4. Pause, responda e confira. Depois, é só revisar e fazer as avaliações com calma.</a:t>
             </a:r>
             <a:endParaRPr lang="en-US" dirty="0"/>
           </a:p>
@@ -3797,7 +3798,7 @@
           <a:p>
             <a:r>
               <a:rPr lang="en-US" dirty="0"/>
-              <a:t/>
+              <a:t>Pergunta 1. PIB nominal +10% e inflação de 6%: o crescimento real foi de cerca de: Letra a: 16%. Letra b: 3,8%. Letra c: 10%. Letra d: 0,6%. Pause o vídeo e escolha a sua resposta.</a:t>
             </a:r>
             <a:endParaRPr lang="en-US" dirty="0"/>
           </a:p>
@@ -3885,7 +3886,7 @@
           <a:p>
             <a:r>
               <a:rPr lang="en-US" dirty="0"/>
-              <a:t/>
+              <a:t>A resposta correta é a letra b: 3,8%. (1,10 ÷ 1,06) − 1 ≈ 3,8%.</a:t>
             </a:r>
             <a:endParaRPr lang="en-US" dirty="0"/>
           </a:p>
@@ -3973,7 +3974,7 @@
           <a:p>
             <a:r>
               <a:rPr lang="en-US" dirty="0"/>
-              <a:t/>
+              <a:t>Pergunta 2. O índice oficial de inflação no Brasil é o: Letra a: IPCA. Letra b: IGP-M. Letra c: INPC. Letra d: IDH. Pause o vídeo e escolha a sua resposta.</a:t>
             </a:r>
             <a:endParaRPr lang="en-US" dirty="0"/>
           </a:p>
@@ -4061,7 +4062,7 @@
           <a:p>
             <a:r>
               <a:rPr lang="en-US" dirty="0"/>
-              <a:t/>
+              <a:t>A resposta correta é a letra a: IPCA. O IPCA, do IBGE, é a referência do regime de metas de inflação.</a:t>
             </a:r>
             <a:endParaRPr lang="en-US" dirty="0"/>
           </a:p>
@@ -4149,7 +4150,7 @@
           <a:p>
             <a:r>
               <a:rPr lang="en-US" dirty="0"/>
-              <a:t/>
+              <a:t>Pergunta 3. A taxa de desocupação é: Letra a: Desocupados ÷ população total. Letra b: Ocupados ÷ força de trabalho. Letra c: Desocupados ÷ força de trabalho. Letra d: Informais ÷ ocupados. Pause o vídeo e escolha a sua resposta.</a:t>
             </a:r>
             <a:endParaRPr lang="en-US" dirty="0"/>
           </a:p>
@@ -4237,7 +4238,7 @@
           <a:p>
             <a:r>
               <a:rPr lang="en-US" dirty="0"/>
-              <a:t/>
+              <a:t>A resposta correta é a letra c: Desocupados ÷ força de trabalho. A força de trabalho reúne ocupados e desocupados.</a:t>
             </a:r>
             <a:endParaRPr lang="en-US" dirty="0"/>
           </a:p>
@@ -4325,7 +4326,7 @@
           <a:p>
             <a:r>
               <a:rPr lang="en-US" dirty="0"/>
-              <a:t/>
+              <a:t>Pergunta 4. As expectativas de mercado para inflação e PIB são publicadas semanalmente no: Letra a: Censo. Letra b: Carta de Conjuntura. Letra c: SICONFI. Letra d: Boletim Focus. Pause o vídeo e escolha a sua resposta.</a:t>
             </a:r>
             <a:endParaRPr lang="en-US" dirty="0"/>
           </a:p>
@@ -4413,7 +4414,7 @@
           <a:p>
             <a:r>
               <a:rPr lang="en-US" dirty="0"/>
-              <a:t/>
+              <a:t>A resposta correta é a letra d: Boletim Focus. O Boletim Focus, do Banco Central, sai toda semana.</a:t>
             </a:r>
             <a:endParaRPr lang="en-US" dirty="0"/>
           </a:p>
@@ -4501,7 +4502,7 @@
           <a:p>
             <a:r>
               <a:rPr lang="en-US" dirty="0"/>
-              <a:t/>
+              <a:t>Parte 1, que corresponde ao tópico 7 do sumário: dados e indicadores econômicos. Produção, preços, trabalho, juros e contas públicas.</a:t>
             </a:r>
             <a:endParaRPr lang="en-US" dirty="0"/>
           </a:p>
@@ -4589,7 +4590,7 @@
           <a:p>
             <a:r>
               <a:rPr lang="en-US" dirty="0"/>
-              <a:t/>
+              <a:t>Pergunta 5. A produção agrícola de cada município é pesquisada pela: Letra a: PMC. Letra b: PAM. Letra c: PIM-PF. Letra d: PNAD Contínua. Pause o vídeo e escolha a sua resposta.</a:t>
             </a:r>
             <a:endParaRPr lang="en-US" dirty="0"/>
           </a:p>
@@ -4677,7 +4678,7 @@
           <a:p>
             <a:r>
               <a:rPr lang="en-US" dirty="0"/>
-              <a:t/>
+              <a:t>A resposta correta é a letra b: PAM. A Produção Agrícola Municipal (PAM) é anual e traz dados por município.</a:t>
             </a:r>
             <a:endParaRPr lang="en-US" dirty="0"/>
           </a:p>
@@ -4701,6 +4702,94 @@
             <a:fld id="{F7021451-1387-4CA6-816F-3879F97B5CBC}" type="slidenum">
               <a:rPr lang="en-US"/>
               <a:t>31</a:t>
+            </a:fld>
+            <a:endParaRPr lang="en-US"/>
+          </a:p>
+        </p:txBody>
+      </p:sp>
+    </p:spTree>
+    <p:extLst>
+      <p:ext uri="{BB962C8B-B14F-4D97-AF65-F5344CB8AC3E}">
+        <p14:creationId xmlns:p14="http://schemas.microsoft.com/office/powerpoint/2010/main" val="1024086991"/>
+      </p:ext>
+    </p:extLst>
+  </p:cSld>
+  <p:clrMapOvr>
+    <a:masterClrMapping/>
+  </p:clrMapOvr>
+</p:notes>
+</file>
+
+<file path=ppt/notesSlides/notesSlide32.xml><?xml version="1.0" encoding="utf-8"?>
+<p:notes xmlns:a="http://schemas.openxmlformats.org/drawingml/2006/main" xmlns:r="http://schemas.openxmlformats.org/officeDocument/2006/relationships" xmlns:p="http://schemas.openxmlformats.org/presentationml/2006/main">
+  <p:cSld>
+    <p:spTree>
+      <p:nvGrpSpPr>
+        <p:cNvPr id="1" name=""/>
+        <p:cNvGrpSpPr/>
+        <p:nvPr/>
+      </p:nvGrpSpPr>
+      <p:grpSpPr>
+        <a:xfrm>
+          <a:off x="0" y="0"/>
+          <a:ext cx="0" cy="0"/>
+          <a:chOff x="0" y="0"/>
+          <a:chExt cx="0" cy="0"/>
+        </a:xfrm>
+      </p:grpSpPr>
+      <p:sp>
+        <p:nvSpPr>
+          <p:cNvPr id="2" name="Slide Image Placeholder 1"/>
+          <p:cNvSpPr>
+            <a:spLocks noGrp="1" noRot="1" noChangeAspect="1"/>
+          </p:cNvSpPr>
+          <p:nvPr>
+            <p:ph type="sldImg"/>
+          </p:nvPr>
+        </p:nvSpPr>
+        <p:spPr/>
+      </p:sp>
+      <p:sp>
+        <p:nvSpPr>
+          <p:cNvPr id="3" name="Notes Placeholder 2"/>
+          <p:cNvSpPr>
+            <a:spLocks noGrp="1"/>
+          </p:cNvSpPr>
+          <p:nvPr>
+            <p:ph type="body" idx="1"/>
+          </p:nvPr>
+        </p:nvSpPr>
+        <p:spPr/>
+        <p:txBody>
+          <a:bodyPr/>
+          <a:lstStyle/>
+          <a:p>
+            <a:r>
+              <a:rPr lang="en-US" dirty="0"/>
+              <a:t>Para fechar a Unidade 4 e a disciplina, vamos recapitular. [Apontar para o quadro da esquerda.] No tópico 7, vimos o PIB e as suas três óticas, a diferença entre valores nominais e reais, os índices de preços IPCA, INPC e IGP-M, os indicadores do mercado de trabalho e as fontes para o município, e a Selic, o câmbio, o resultado primário e a LRF. [Apontar para o quadro da direita.] No tópico 8, conhecemos as pesquisas econômicas do IBGE, os boletins de conjuntura e um roteiro de cinco passos para ler a conjuntura, e vimos como ela chega ao orçamento municipal. Lembre de fazer a A2 e a A3 no SIGAA, nas datas divulgadas. Obrigado pela dedicação ao longo destas semanas. Bons estudos, boas avaliações e até a próxima disciplina!</a:t>
+            </a:r>
+            <a:endParaRPr lang="en-US" dirty="0"/>
+          </a:p>
+        </p:txBody>
+      </p:sp>
+      <p:sp>
+        <p:nvSpPr>
+          <p:cNvPr id="4" name="Slide Number Placeholder 3"/>
+          <p:cNvSpPr>
+            <a:spLocks noGrp="1"/>
+          </p:cNvSpPr>
+          <p:nvPr>
+            <p:ph type="sldNum" sz="quarter" idx="10"/>
+          </p:nvPr>
+        </p:nvSpPr>
+        <p:spPr/>
+        <p:txBody>
+          <a:bodyPr/>
+          <a:lstStyle/>
+          <a:p>
+            <a:fld id="{F7021451-1387-4CA6-816F-3879F97B5CBC}" type="slidenum">
+              <a:rPr lang="en-US"/>
+              <a:t>32</a:t>
             </a:fld>
             <a:endParaRPr lang="en-US"/>
           </a:p>
@@ -4765,7 +4854,7 @@
           <a:p>
             <a:r>
               <a:rPr lang="en-US" dirty="0"/>
-              <a:t/>
+              <a:t>O Produto Interno Bruto é o valor dos bens e serviços finais produzidos em um período. Ele pode ser medido por três óticas. Pela produção: a soma do valor adicionado pela agropecuária, pela indústria e pelos serviços. Pela despesa: consumo, mais investimento, mais gasto do governo, mais exportações menos importações. E pela renda: salários, lucros, juros e aluguéis gerados na produção. O IBGE divulga o PIB trimestral do país e o PIB anual dos municípios, com o valor adicionado por setor.</a:t>
             </a:r>
             <a:endParaRPr lang="en-US" dirty="0"/>
           </a:p>
@@ -4853,7 +4942,7 @@
           <a:p>
             <a:r>
               <a:rPr lang="en-US" dirty="0"/>
-              <a:t/>
+              <a:t>Este gráfico mostra o PIB do Brasil ano a ano. [Apontar para as colunas negativas e depois para as positivas.] Houve recessão em 2015 e 2016, com quedas de mais de 3% ao ano. Em 2020, nova queda, por causa da pandemia. E, a partir de 2021, recuperação. Um detalhe prático: o PIB anual dos municípios é divulgado com cerca de dois anos de defasagem.</a:t>
             </a:r>
             <a:endParaRPr lang="en-US" dirty="0"/>
           </a:p>
@@ -4941,7 +5030,7 @@
           <a:p>
             <a:r>
               <a:rPr lang="en-US" dirty="0"/>
-              <a:t/>
+              <a:t>Uma distinção fundamental: valores nominais e reais. O valor nominal é medido a preços correntes e mistura quantidade e preço. O valor real é o valor descontada a inflação, ou deflacionado, e mostra a variação de quantidade. Veja o exemplo: se o PIB de um município cresceu 10% e a inflação foi de 6%, o crescimento real foi de 1,10 dividido por 1,06, menos 1, cerca de 3,8%. O restante foi aumento de preços. Por isso, receitas, salários e gastos devem ser comparados em termos reais.</a:t>
             </a:r>
             <a:endParaRPr lang="en-US" dirty="0"/>
           </a:p>
@@ -5029,7 +5118,7 @@
           <a:p>
             <a:r>
               <a:rPr lang="en-US" dirty="0"/>
-              <a:t/>
+              <a:t>O gráfico mostra a receita de um município hipotético. [Apontar para as colunas cinza e depois para as verdes.] Em valores nominais, a receita subiu de 500 para 650 milhões de reais, 30%. Mas, com inflação de 6%, 5% e 4% ao ano, o aumento real foi de apenas cerca de 12%: de 500 para 562 milhões, a preços de 2021. A regra é: o valor real é o nominal dividido pelo índice de preços acumulado.</a:t>
             </a:r>
             <a:endParaRPr lang="en-US" dirty="0"/>
           </a:p>
@@ -5117,7 +5206,7 @@
           <a:p>
             <a:r>
               <a:rPr lang="en-US" dirty="0"/>
-              <a:t/>
+              <a:t>Para deflacionar, usamos índices de preços. O IPCA, do IBGE, é o índice oficial de inflação e a referência da meta definida pelo Conselho Monetário Nacional. O INPC, também do IBGE, mede a inflação das famílias de menor renda e é usado no reajuste de benefícios do INSS e do salário mínimo. E o IGP-M, da FGV, é um índice geral de preços muito usado em contratos de aluguel. Na prefeitura, contratos de aluguel e de serviços continuados costumam ser reajustados por índices de preços; conhecer o índice evita surpresas no orçamento.</a:t>
             </a:r>
             <a:endParaRPr lang="en-US" dirty="0"/>
           </a:p>
@@ -5205,7 +5294,7 @@
           <a:p>
             <a:r>
               <a:rPr lang="en-US" dirty="0"/>
-              <a:t/>
+              <a:t>O gráfico mostra o IPCA de 2015 a 2024. [Apontar para os picos.] Houve picos em 2015 e 2021, acima de 10%. Em 2017, ao contrário, a inflação ficou abaixo do piso da meta. Para o gestor, a lição é que contratos reajustados pelo índice sobem junto com ele, e isso precisa estar previsto no orçamento.</a:t>
             </a:r>
             <a:endParaRPr lang="en-US" dirty="0"/>
           </a:p>
@@ -6280,7 +6369,7 @@
                 <a:ea typeface="Calibri" pitchFamily="34" charset="-122"/>
                 <a:cs typeface="Calibri" pitchFamily="34" charset="-120"/>
               </a:rPr>
-              <a:t>Indicadores Socioeconômicos · Unidade 4</a:t>
+              <a:t>Indicadores Socioeconômicos · Unidade 4 · Tópico 7 do sumário</a:t>
             </a:r>
             <a:endParaRPr lang="en-US" sz="950" dirty="0"/>
           </a:p>
@@ -6717,7 +6806,7 @@
                 <a:ea typeface="Calibri" pitchFamily="34" charset="-122"/>
                 <a:cs typeface="Calibri" pitchFamily="34" charset="-120"/>
               </a:rPr>
-              <a:t>Indicadores Socioeconômicos · Unidade 4</a:t>
+              <a:t>Indicadores Socioeconômicos · Unidade 4 · Tópico 7 do sumário</a:t>
             </a:r>
             <a:endParaRPr lang="en-US" sz="950" dirty="0"/>
           </a:p>
@@ -7392,7 +7481,7 @@
                 <a:ea typeface="Calibri" pitchFamily="34" charset="-122"/>
                 <a:cs typeface="Calibri" pitchFamily="34" charset="-120"/>
               </a:rPr>
-              <a:t>Indicadores Socioeconômicos · Unidade 4</a:t>
+              <a:t>Indicadores Socioeconômicos · Unidade 4 · Tópico 7 do sumário</a:t>
             </a:r>
             <a:endParaRPr lang="en-US" sz="950" dirty="0"/>
           </a:p>
@@ -7805,7 +7894,7 @@
                 <a:ea typeface="Calibri" pitchFamily="34" charset="-122"/>
                 <a:cs typeface="Calibri" pitchFamily="34" charset="-120"/>
               </a:rPr>
-              <a:t>Indicadores Socioeconômicos · Unidade 4</a:t>
+              <a:t>Indicadores Socioeconômicos · Unidade 4 · Tópico 7 do sumário</a:t>
             </a:r>
             <a:endParaRPr lang="en-US" sz="950" dirty="0"/>
           </a:p>
@@ -8218,7 +8307,7 @@
                 <a:ea typeface="Calibri" pitchFamily="34" charset="-122"/>
                 <a:cs typeface="Calibri" pitchFamily="34" charset="-120"/>
               </a:rPr>
-              <a:t>Indicadores Socioeconômicos · Unidade 4</a:t>
+              <a:t>Indicadores Socioeconômicos · Unidade 4 · Tópico 7 do sumário</a:t>
             </a:r>
             <a:endParaRPr lang="en-US" sz="950" dirty="0"/>
           </a:p>
@@ -8299,7 +8388,7 @@
                 <a:ea typeface="Calibri" pitchFamily="34" charset="-122"/>
                 <a:cs typeface="Calibri" pitchFamily="34" charset="-120"/>
               </a:rPr>
-              <a:t>PARTE 2</a:t>
+              <a:t>PARTE 2 · TÓPICO 8 DO SUMÁRIO</a:t>
             </a:r>
             <a:endParaRPr lang="en-US" sz="1600" dirty="0"/>
           </a:p>
@@ -8314,7 +8403,7 @@
         <p:spPr>
           <a:xfrm>
             <a:off x="731520" y="1874520"/>
-            <a:ext cx="7680960" cy="822960"/>
+            <a:ext cx="7680960" cy="1097280"/>
           </a:xfrm>
           <a:prstGeom prst="rect">
             <a:avLst/>
@@ -8333,7 +8422,7 @@
               <a:buNone/>
             </a:pPr>
             <a:r>
-              <a:rPr lang="en-US" sz="3600" b="1" dirty="0">
+              <a:rPr lang="en-US" sz="3000" b="1" dirty="0">
                 <a:solidFill>
                   <a:srgbClr val="13294B"/>
                 </a:solidFill>
@@ -8341,9 +8430,9 @@
                 <a:ea typeface="Calibri" pitchFamily="34" charset="-122"/>
                 <a:cs typeface="Calibri" pitchFamily="34" charset="-120"/>
               </a:rPr>
-              <a:t>Pesquisas econômicas e conjuntura</a:t>
-            </a:r>
-            <a:endParaRPr lang="en-US" sz="3600" dirty="0"/>
+              <a:t>Pesquisas econômicas do IBGE e boletins de conjuntura</a:t>
+            </a:r>
+            <a:endParaRPr lang="en-US" sz="3000" dirty="0"/>
           </a:p>
         </p:txBody>
       </p:sp>
@@ -8355,7 +8444,7 @@
         </p:nvSpPr>
         <p:spPr>
           <a:xfrm>
-            <a:off x="1188720" y="2697480"/>
+            <a:off x="1188720" y="2971800"/>
             <a:ext cx="6766560" cy="457200"/>
           </a:xfrm>
           <a:prstGeom prst="rect">
@@ -8425,7 +8514,7 @@
                 <a:ea typeface="Calibri" pitchFamily="34" charset="-122"/>
                 <a:cs typeface="Calibri" pitchFamily="34" charset="-120"/>
               </a:rPr>
-              <a:t>Indicadores Socioeconômicos · Unidade 4</a:t>
+              <a:t>Indicadores Socioeconômicos · Unidade 4 · Tópico 8 do sumário</a:t>
             </a:r>
             <a:endParaRPr lang="en-US" sz="950" dirty="0"/>
           </a:p>
@@ -9971,7 +10060,7 @@
                 <a:ea typeface="Calibri" pitchFamily="34" charset="-122"/>
                 <a:cs typeface="Calibri" pitchFamily="34" charset="-120"/>
               </a:rPr>
-              <a:t>Indicadores Socioeconômicos · Unidade 4</a:t>
+              <a:t>Indicadores Socioeconômicos · Unidade 4 · Tópico 8 do sumário</a:t>
             </a:r>
             <a:endParaRPr lang="en-US" sz="950" dirty="0"/>
           </a:p>
@@ -10738,7 +10827,7 @@
                 <a:ea typeface="Calibri" pitchFamily="34" charset="-122"/>
                 <a:cs typeface="Calibri" pitchFamily="34" charset="-120"/>
               </a:rPr>
-              <a:t>Indicadores Socioeconômicos · Unidade 4</a:t>
+              <a:t>Indicadores Socioeconômicos · Unidade 4 · Tópico 8 do sumário</a:t>
             </a:r>
             <a:endParaRPr lang="en-US" sz="950" dirty="0"/>
           </a:p>
@@ -11421,7 +11510,7 @@
                 <a:ea typeface="Calibri" pitchFamily="34" charset="-122"/>
                 <a:cs typeface="Calibri" pitchFamily="34" charset="-120"/>
               </a:rPr>
-              <a:t>Indicadores Socioeconômicos · Unidade 4</a:t>
+              <a:t>Indicadores Socioeconômicos · Unidade 4 · Tópico 8 do sumário</a:t>
             </a:r>
             <a:endParaRPr lang="en-US" sz="950" dirty="0"/>
           </a:p>
@@ -11919,7 +12008,7 @@
                 <a:ea typeface="Calibri" pitchFamily="34" charset="-122"/>
                 <a:cs typeface="Calibri" pitchFamily="34" charset="-120"/>
               </a:rPr>
-              <a:t>Indicadores Socioeconômicos · Unidade 4</a:t>
+              <a:t>Indicadores Socioeconômicos · Unidade 4 · Tópico 8 do sumário</a:t>
             </a:r>
             <a:endParaRPr lang="en-US" sz="950" dirty="0"/>
           </a:p>
@@ -12652,7 +12741,7 @@
                 <a:ea typeface="Calibri" pitchFamily="34" charset="-122"/>
                 <a:cs typeface="Calibri" pitchFamily="34" charset="-120"/>
               </a:rPr>
-              <a:t>Página de conteúdos: Unidades 7 e 8 · Exercícios de fixação 2 · A2</a:t>
+              <a:t>Página de conteúdos: tópicos 7 e 8 do sumário · Exercícios de fixação 2 · A2</a:t>
             </a:r>
             <a:endParaRPr lang="en-US" sz="1500" dirty="0"/>
           </a:p>
@@ -19127,7 +19216,7 @@
                 <a:ea typeface="Calibri" pitchFamily="34" charset="-122"/>
                 <a:cs typeface="Calibri" pitchFamily="34" charset="-120"/>
               </a:rPr>
-              <a:t>PARTE 1</a:t>
+              <a:t>PARTE 1 · TÓPICO 7 DO SUMÁRIO</a:t>
             </a:r>
             <a:endParaRPr lang="en-US" sz="1600" dirty="0"/>
           </a:p>
@@ -19253,7 +19342,7 @@
                 <a:ea typeface="Calibri" pitchFamily="34" charset="-122"/>
                 <a:cs typeface="Calibri" pitchFamily="34" charset="-120"/>
               </a:rPr>
-              <a:t>Indicadores Socioeconômicos · Unidade 4</a:t>
+              <a:t>Indicadores Socioeconômicos · Unidade 4 · Tópico 7 do sumário</a:t>
             </a:r>
             <a:endParaRPr lang="en-US" sz="950" dirty="0"/>
           </a:p>
@@ -20580,6 +20669,581 @@
 </p:sld>
 </file>
 
+<file path=ppt/slides/slide32.xml><?xml version="1.0" encoding="utf-8"?>
+<p:sld xmlns:a="http://schemas.openxmlformats.org/drawingml/2006/main" xmlns:r="http://schemas.openxmlformats.org/officeDocument/2006/relationships" xmlns:p="http://schemas.openxmlformats.org/presentationml/2006/main">
+  <p:cSld name="Slide 32">
+    <p:bg>
+      <p:bgPr>
+        <a:blipFill dpi="0" rotWithShape="1">
+          <a:blip r:embed="rId1">
+            <a:lum/>
+          </a:blip>
+          <a:srcRect/>
+          <a:stretch>
+            <a:fillRect/>
+          </a:stretch>
+        </a:blipFill>
+        <a:effectLst/>
+      </p:bgPr>
+    </p:bg>
+    <p:spTree>
+      <p:nvGrpSpPr>
+        <p:cNvPr id="1" name=""/>
+        <p:cNvGrpSpPr/>
+        <p:nvPr/>
+      </p:nvGrpSpPr>
+      <p:grpSpPr>
+        <a:xfrm>
+          <a:off x="0" y="0"/>
+          <a:ext cx="0" cy="0"/>
+          <a:chOff x="0" y="0"/>
+          <a:chExt cx="0" cy="0"/>
+        </a:xfrm>
+      </p:grpSpPr>
+      <p:sp>
+        <p:nvSpPr>
+          <p:cNvPr id="2" name="Text 0"/>
+          <p:cNvSpPr txBox="1"/>
+          <p:nvPr/>
+        </p:nvSpPr>
+        <p:spPr>
+          <a:xfrm>
+            <a:off x="731520" y="256032"/>
+            <a:ext cx="7680960" cy="566928"/>
+          </a:xfrm>
+          <a:prstGeom prst="rect">
+            <a:avLst/>
+          </a:prstGeom>
+          <a:noFill/>
+          <a:ln/>
+        </p:spPr>
+        <p:txBody>
+          <a:bodyPr wrap="square" lIns="0" tIns="0" rIns="0" bIns="0" rtlCol="0" anchor="ctr"/>
+          <a:lstStyle/>
+          <a:p>
+            <a:pPr algn="ctr" indent="0" marL="0">
+              <a:lnSpc>
+                <a:spcPct val="100000"/>
+              </a:lnSpc>
+              <a:buNone/>
+            </a:pPr>
+            <a:r>
+              <a:rPr lang="en-US" sz="2800" b="1" dirty="0">
+                <a:solidFill>
+                  <a:srgbClr val="13294B"/>
+                </a:solidFill>
+                <a:latin typeface="Calibri" pitchFamily="34" charset="0"/>
+                <a:ea typeface="Calibri" pitchFamily="34" charset="-122"/>
+                <a:cs typeface="Calibri" pitchFamily="34" charset="-120"/>
+              </a:rPr>
+              <a:t>Resumo da Unidade 4</a:t>
+            </a:r>
+            <a:endParaRPr lang="en-US" sz="2800" dirty="0"/>
+          </a:p>
+        </p:txBody>
+      </p:sp>
+      <p:sp>
+        <p:nvSpPr>
+          <p:cNvPr id="3" name="Text 1"/>
+          <p:cNvSpPr txBox="1"/>
+          <p:nvPr/>
+        </p:nvSpPr>
+        <p:spPr>
+          <a:xfrm>
+            <a:off x="1005840" y="804672"/>
+            <a:ext cx="7132320" cy="329184"/>
+          </a:xfrm>
+          <a:prstGeom prst="rect">
+            <a:avLst/>
+          </a:prstGeom>
+          <a:noFill/>
+          <a:ln/>
+        </p:spPr>
+        <p:txBody>
+          <a:bodyPr wrap="square" lIns="0" tIns="0" rIns="0" bIns="0" rtlCol="0" anchor="ctr"/>
+          <a:lstStyle/>
+          <a:p>
+            <a:pPr algn="ctr" indent="0" marL="0">
+              <a:lnSpc>
+                <a:spcPct val="100000"/>
+              </a:lnSpc>
+              <a:buNone/>
+            </a:pPr>
+            <a:r>
+              <a:rPr lang="en-US" sz="1400" dirty="0">
+                <a:solidFill>
+                  <a:srgbClr val="5B6770"/>
+                </a:solidFill>
+                <a:latin typeface="Calibri" pitchFamily="34" charset="0"/>
+                <a:ea typeface="Calibri" pitchFamily="34" charset="-122"/>
+                <a:cs typeface="Calibri" pitchFamily="34" charset="-120"/>
+              </a:rPr>
+              <a:t>O que discutimos nesta unidade</a:t>
+            </a:r>
+            <a:endParaRPr lang="en-US" sz="1400" dirty="0"/>
+          </a:p>
+        </p:txBody>
+      </p:sp>
+      <p:sp>
+        <p:nvSpPr>
+          <p:cNvPr id="4" name="Text 2"/>
+          <p:cNvSpPr txBox="1"/>
+          <p:nvPr/>
+        </p:nvSpPr>
+        <p:spPr>
+          <a:xfrm>
+            <a:off x="685800" y="1170432"/>
+            <a:ext cx="3794760" cy="2743200"/>
+          </a:xfrm>
+          <a:prstGeom prst="roundRect">
+            <a:avLst>
+              <a:gd name="adj" fmla="val 2000"/>
+            </a:avLst>
+          </a:prstGeom>
+          <a:solidFill>
+            <a:srgbClr val="FFFFFF"/>
+          </a:solidFill>
+          <a:ln w="12700">
+            <a:solidFill>
+              <a:srgbClr val="DCD5C1"/>
+            </a:solidFill>
+          </a:ln>
+        </p:spPr>
+        <p:txBody>
+          <a:bodyPr wrap="square" lIns="114300" tIns="114300" rIns="114300" bIns="114300" rtlCol="0" anchor="t"/>
+          <a:lstStyle/>
+          <a:p>
+            <a:pPr algn="l" indent="0" marL="0">
+              <a:lnSpc>
+                <a:spcPct val="100000"/>
+              </a:lnSpc>
+              <a:spcAft>
+                <a:spcPts val="200"/>
+              </a:spcAft>
+              <a:buNone/>
+            </a:pPr>
+            <a:r>
+              <a:rPr lang="en-US" sz="1100" b="1" dirty="0">
+                <a:solidFill>
+                  <a:srgbClr val="2A8C85"/>
+                </a:solidFill>
+                <a:latin typeface="Calibri" pitchFamily="34" charset="0"/>
+                <a:ea typeface="Calibri" pitchFamily="34" charset="-122"/>
+                <a:cs typeface="Calibri" pitchFamily="34" charset="-120"/>
+              </a:rPr>
+              <a:t>PARTE 1 · TÓPICO 7</a:t>
+            </a:r>
+            <a:endParaRPr lang="en-US" sz="1100" dirty="0"/>
+          </a:p>
+          <a:p>
+            <a:pPr algn="l" indent="0" marL="0">
+              <a:lnSpc>
+                <a:spcPct val="100000"/>
+              </a:lnSpc>
+              <a:spcAft>
+                <a:spcPts val="400"/>
+              </a:spcAft>
+              <a:buNone/>
+            </a:pPr>
+            <a:r>
+              <a:rPr lang="en-US" sz="1450" b="1" dirty="0">
+                <a:solidFill>
+                  <a:srgbClr val="13294B"/>
+                </a:solidFill>
+                <a:latin typeface="Calibri" pitchFamily="34" charset="0"/>
+                <a:ea typeface="Calibri" pitchFamily="34" charset="-122"/>
+                <a:cs typeface="Calibri" pitchFamily="34" charset="-120"/>
+              </a:rPr>
+              <a:t>Dados e indicadores econômicos</a:t>
+            </a:r>
+            <a:endParaRPr lang="en-US" sz="1100" dirty="0"/>
+          </a:p>
+          <a:p>
+            <a:pPr algn="l" marL="177800" indent="-177800">
+              <a:lnSpc>
+                <a:spcPct val="100000"/>
+              </a:lnSpc>
+              <a:spcAft>
+                <a:spcPts val="300"/>
+              </a:spcAft>
+              <a:buSzPct val="100000"/>
+              <a:buChar char="•"/>
+            </a:pPr>
+            <a:r>
+              <a:rPr lang="en-US" sz="1200" dirty="0">
+                <a:solidFill>
+                  <a:srgbClr val="1F2A37"/>
+                </a:solidFill>
+                <a:latin typeface="Calibri" pitchFamily="34" charset="0"/>
+                <a:ea typeface="Calibri" pitchFamily="34" charset="-122"/>
+                <a:cs typeface="Calibri" pitchFamily="34" charset="-120"/>
+              </a:rPr>
+              <a:t>PIB pelas óticas da produção, da despesa e da renda.</a:t>
+            </a:r>
+            <a:endParaRPr lang="en-US" sz="1100" dirty="0"/>
+          </a:p>
+          <a:p>
+            <a:pPr algn="l" marL="177800" indent="-177800">
+              <a:lnSpc>
+                <a:spcPct val="100000"/>
+              </a:lnSpc>
+              <a:spcAft>
+                <a:spcPts val="300"/>
+              </a:spcAft>
+              <a:buSzPct val="100000"/>
+              <a:buChar char="•"/>
+            </a:pPr>
+            <a:r>
+              <a:rPr lang="en-US" sz="1200" dirty="0">
+                <a:solidFill>
+                  <a:srgbClr val="1F2A37"/>
+                </a:solidFill>
+                <a:latin typeface="Calibri" pitchFamily="34" charset="0"/>
+                <a:ea typeface="Calibri" pitchFamily="34" charset="-122"/>
+                <a:cs typeface="Calibri" pitchFamily="34" charset="-120"/>
+              </a:rPr>
+              <a:t>Nominal × real: deflacionar pelos índices de preços.</a:t>
+            </a:r>
+            <a:endParaRPr lang="en-US" sz="1100" dirty="0"/>
+          </a:p>
+          <a:p>
+            <a:pPr algn="l" marL="177800" indent="-177800">
+              <a:lnSpc>
+                <a:spcPct val="100000"/>
+              </a:lnSpc>
+              <a:spcAft>
+                <a:spcPts val="300"/>
+              </a:spcAft>
+              <a:buSzPct val="100000"/>
+              <a:buChar char="•"/>
+            </a:pPr>
+            <a:r>
+              <a:rPr lang="en-US" sz="1200" dirty="0">
+                <a:solidFill>
+                  <a:srgbClr val="1F2A37"/>
+                </a:solidFill>
+                <a:latin typeface="Calibri" pitchFamily="34" charset="0"/>
+                <a:ea typeface="Calibri" pitchFamily="34" charset="-122"/>
+                <a:cs typeface="Calibri" pitchFamily="34" charset="-120"/>
+              </a:rPr>
+              <a:t>IPCA, INPC e IGP-M e os seus usos.</a:t>
+            </a:r>
+            <a:endParaRPr lang="en-US" sz="1100" dirty="0"/>
+          </a:p>
+          <a:p>
+            <a:pPr algn="l" marL="177800" indent="-177800">
+              <a:lnSpc>
+                <a:spcPct val="100000"/>
+              </a:lnSpc>
+              <a:spcAft>
+                <a:spcPts val="300"/>
+              </a:spcAft>
+              <a:buSzPct val="100000"/>
+              <a:buChar char="•"/>
+            </a:pPr>
+            <a:r>
+              <a:rPr lang="en-US" sz="1200" dirty="0">
+                <a:solidFill>
+                  <a:srgbClr val="1F2A37"/>
+                </a:solidFill>
+                <a:latin typeface="Calibri" pitchFamily="34" charset="0"/>
+                <a:ea typeface="Calibri" pitchFamily="34" charset="-122"/>
+                <a:cs typeface="Calibri" pitchFamily="34" charset="-120"/>
+              </a:rPr>
+              <a:t>Trabalho: PNAD Contínua, CAGED e RAIS.</a:t>
+            </a:r>
+            <a:endParaRPr lang="en-US" sz="1100" dirty="0"/>
+          </a:p>
+          <a:p>
+            <a:pPr algn="l" marL="177800" indent="-177800">
+              <a:lnSpc>
+                <a:spcPct val="100000"/>
+              </a:lnSpc>
+              <a:spcAft>
+                <a:spcPts val="300"/>
+              </a:spcAft>
+              <a:buSzPct val="100000"/>
+              <a:buChar char="•"/>
+            </a:pPr>
+            <a:r>
+              <a:rPr lang="en-US" sz="1200" dirty="0">
+                <a:solidFill>
+                  <a:srgbClr val="1F2A37"/>
+                </a:solidFill>
+                <a:latin typeface="Calibri" pitchFamily="34" charset="0"/>
+                <a:ea typeface="Calibri" pitchFamily="34" charset="-122"/>
+                <a:cs typeface="Calibri" pitchFamily="34" charset="-120"/>
+              </a:rPr>
+              <a:t>Selic, câmbio, resultado primário e LRF.</a:t>
+            </a:r>
+            <a:endParaRPr lang="en-US" sz="1100" dirty="0"/>
+          </a:p>
+        </p:txBody>
+      </p:sp>
+      <p:sp>
+        <p:nvSpPr>
+          <p:cNvPr id="5" name="Text 3"/>
+          <p:cNvSpPr txBox="1"/>
+          <p:nvPr/>
+        </p:nvSpPr>
+        <p:spPr>
+          <a:xfrm>
+            <a:off x="4663440" y="1170432"/>
+            <a:ext cx="3794760" cy="2743200"/>
+          </a:xfrm>
+          <a:prstGeom prst="roundRect">
+            <a:avLst>
+              <a:gd name="adj" fmla="val 2000"/>
+            </a:avLst>
+          </a:prstGeom>
+          <a:solidFill>
+            <a:srgbClr val="E6F2F0"/>
+          </a:solidFill>
+          <a:ln/>
+        </p:spPr>
+        <p:txBody>
+          <a:bodyPr wrap="square" lIns="114300" tIns="114300" rIns="114300" bIns="114300" rtlCol="0" anchor="t"/>
+          <a:lstStyle/>
+          <a:p>
+            <a:pPr algn="l" indent="0" marL="0">
+              <a:lnSpc>
+                <a:spcPct val="100000"/>
+              </a:lnSpc>
+              <a:spcAft>
+                <a:spcPts val="200"/>
+              </a:spcAft>
+              <a:buNone/>
+            </a:pPr>
+            <a:r>
+              <a:rPr lang="en-US" sz="1100" b="1" dirty="0">
+                <a:solidFill>
+                  <a:srgbClr val="2A8C85"/>
+                </a:solidFill>
+                <a:latin typeface="Calibri" pitchFamily="34" charset="0"/>
+                <a:ea typeface="Calibri" pitchFamily="34" charset="-122"/>
+                <a:cs typeface="Calibri" pitchFamily="34" charset="-120"/>
+              </a:rPr>
+              <a:t>PARTE 2 · TÓPICO 8</a:t>
+            </a:r>
+            <a:endParaRPr lang="en-US" sz="1100" dirty="0"/>
+          </a:p>
+          <a:p>
+            <a:pPr algn="l" indent="0" marL="0">
+              <a:lnSpc>
+                <a:spcPct val="100000"/>
+              </a:lnSpc>
+              <a:spcAft>
+                <a:spcPts val="400"/>
+              </a:spcAft>
+              <a:buNone/>
+            </a:pPr>
+            <a:r>
+              <a:rPr lang="en-US" sz="1450" b="1" dirty="0">
+                <a:solidFill>
+                  <a:srgbClr val="13294B"/>
+                </a:solidFill>
+                <a:latin typeface="Calibri" pitchFamily="34" charset="0"/>
+                <a:ea typeface="Calibri" pitchFamily="34" charset="-122"/>
+                <a:cs typeface="Calibri" pitchFamily="34" charset="-120"/>
+              </a:rPr>
+              <a:t>Pesquisas econômicas e conjuntura</a:t>
+            </a:r>
+            <a:endParaRPr lang="en-US" sz="1100" dirty="0"/>
+          </a:p>
+          <a:p>
+            <a:pPr algn="l" marL="177800" indent="-177800">
+              <a:lnSpc>
+                <a:spcPct val="100000"/>
+              </a:lnSpc>
+              <a:spcAft>
+                <a:spcPts val="300"/>
+              </a:spcAft>
+              <a:buSzPct val="100000"/>
+              <a:buChar char="•"/>
+            </a:pPr>
+            <a:r>
+              <a:rPr lang="en-US" sz="1200" dirty="0">
+                <a:solidFill>
+                  <a:srgbClr val="1F2A37"/>
+                </a:solidFill>
+                <a:latin typeface="Calibri" pitchFamily="34" charset="0"/>
+                <a:ea typeface="Calibri" pitchFamily="34" charset="-122"/>
+                <a:cs typeface="Calibri" pitchFamily="34" charset="-120"/>
+              </a:rPr>
+              <a:t>Contas Nacionais, PIB dos Municípios, PIM-PF, PMC, PMS, LSPA, PAM e PPM.</a:t>
+            </a:r>
+            <a:endParaRPr lang="en-US" sz="1100" dirty="0"/>
+          </a:p>
+          <a:p>
+            <a:pPr algn="l" marL="177800" indent="-177800">
+              <a:lnSpc>
+                <a:spcPct val="100000"/>
+              </a:lnSpc>
+              <a:spcAft>
+                <a:spcPts val="300"/>
+              </a:spcAft>
+              <a:buSzPct val="100000"/>
+              <a:buChar char="•"/>
+            </a:pPr>
+            <a:r>
+              <a:rPr lang="en-US" sz="1200" dirty="0">
+                <a:solidFill>
+                  <a:srgbClr val="1F2A37"/>
+                </a:solidFill>
+                <a:latin typeface="Calibri" pitchFamily="34" charset="0"/>
+                <a:ea typeface="Calibri" pitchFamily="34" charset="-122"/>
+                <a:cs typeface="Calibri" pitchFamily="34" charset="-120"/>
+              </a:rPr>
+              <a:t>Boletins: Focus, Copom, Carta de Conjuntura (IPEA) e Boletim Macro (FGV).</a:t>
+            </a:r>
+            <a:endParaRPr lang="en-US" sz="1100" dirty="0"/>
+          </a:p>
+          <a:p>
+            <a:pPr algn="l" marL="177800" indent="-177800">
+              <a:lnSpc>
+                <a:spcPct val="100000"/>
+              </a:lnSpc>
+              <a:spcAft>
+                <a:spcPts val="300"/>
+              </a:spcAft>
+              <a:buSzPct val="100000"/>
+              <a:buChar char="•"/>
+            </a:pPr>
+            <a:r>
+              <a:rPr lang="en-US" sz="1200" dirty="0">
+                <a:solidFill>
+                  <a:srgbClr val="1F2A37"/>
+                </a:solidFill>
+                <a:latin typeface="Calibri" pitchFamily="34" charset="0"/>
+                <a:ea typeface="Calibri" pitchFamily="34" charset="-122"/>
+                <a:cs typeface="Calibri" pitchFamily="34" charset="-120"/>
+              </a:rPr>
+              <a:t>Conjuntura em cinco passos: atividade, preços, trabalho, juros e câmbio, contas públicas.</a:t>
+            </a:r>
+            <a:endParaRPr lang="en-US" sz="1100" dirty="0"/>
+          </a:p>
+          <a:p>
+            <a:pPr algn="l" marL="177800" indent="-177800">
+              <a:lnSpc>
+                <a:spcPct val="100000"/>
+              </a:lnSpc>
+              <a:spcAft>
+                <a:spcPts val="300"/>
+              </a:spcAft>
+              <a:buSzPct val="100000"/>
+              <a:buChar char="•"/>
+            </a:pPr>
+            <a:r>
+              <a:rPr lang="en-US" sz="1200" dirty="0">
+                <a:solidFill>
+                  <a:srgbClr val="1F2A37"/>
+                </a:solidFill>
+                <a:latin typeface="Calibri" pitchFamily="34" charset="0"/>
+                <a:ea typeface="Calibri" pitchFamily="34" charset="-122"/>
+                <a:cs typeface="Calibri" pitchFamily="34" charset="-120"/>
+              </a:rPr>
+              <a:t>A conjuntura chega ao orçamento: ICMS, FPM, ISS e demanda por serviços.</a:t>
+            </a:r>
+            <a:endParaRPr lang="en-US" sz="1100" dirty="0"/>
+          </a:p>
+        </p:txBody>
+      </p:sp>
+      <p:sp>
+        <p:nvSpPr>
+          <p:cNvPr id="6" name="Text 4"/>
+          <p:cNvSpPr txBox="1"/>
+          <p:nvPr/>
+        </p:nvSpPr>
+        <p:spPr>
+          <a:xfrm>
+            <a:off x="685800" y="3995928"/>
+            <a:ext cx="7772400" cy="484632"/>
+          </a:xfrm>
+          <a:prstGeom prst="roundRect">
+            <a:avLst>
+              <a:gd name="adj" fmla="val 15094"/>
+            </a:avLst>
+          </a:prstGeom>
+          <a:solidFill>
+            <a:srgbClr val="E6F2F0"/>
+          </a:solidFill>
+          <a:ln/>
+        </p:spPr>
+        <p:txBody>
+          <a:bodyPr wrap="square" lIns="127000" tIns="127000" rIns="127000" bIns="127000" rtlCol="0" anchor="ctr"/>
+          <a:lstStyle/>
+          <a:p>
+            <a:pPr algn="ctr" indent="0" marL="0">
+              <a:lnSpc>
+                <a:spcPct val="100000"/>
+              </a:lnSpc>
+              <a:buNone/>
+            </a:pPr>
+            <a:r>
+              <a:rPr lang="en-US" sz="1300" b="1" dirty="0">
+                <a:solidFill>
+                  <a:srgbClr val="13294B"/>
+                </a:solidFill>
+                <a:latin typeface="Calibri" pitchFamily="34" charset="0"/>
+                <a:ea typeface="Calibri" pitchFamily="34" charset="-122"/>
+                <a:cs typeface="Calibri" pitchFamily="34" charset="-120"/>
+              </a:rPr>
+              <a:t>Avaliações: A2 e A3 no SIGAA, nas datas divulgadas pela coordenação. Bons estudos!</a:t>
+            </a:r>
+            <a:endParaRPr lang="en-US" sz="1300" dirty="0"/>
+          </a:p>
+        </p:txBody>
+      </p:sp>
+      <p:sp>
+        <p:nvSpPr>
+          <p:cNvPr id="7" name="Text 5"/>
+          <p:cNvSpPr txBox="1"/>
+          <p:nvPr/>
+        </p:nvSpPr>
+        <p:spPr>
+          <a:xfrm>
+            <a:off x="4206240" y="36576"/>
+            <a:ext cx="4800600" cy="219456"/>
+          </a:xfrm>
+          <a:prstGeom prst="rect">
+            <a:avLst/>
+          </a:prstGeom>
+          <a:noFill/>
+          <a:ln/>
+        </p:spPr>
+        <p:txBody>
+          <a:bodyPr wrap="square" lIns="0" tIns="0" rIns="0" bIns="0" rtlCol="0" anchor="ctr"/>
+          <a:lstStyle/>
+          <a:p>
+            <a:pPr algn="r" indent="0" marL="0">
+              <a:lnSpc>
+                <a:spcPct val="100000"/>
+              </a:lnSpc>
+              <a:buNone/>
+            </a:pPr>
+            <a:r>
+              <a:rPr lang="en-US" sz="950" dirty="0">
+                <a:solidFill>
+                  <a:srgbClr val="5B6770"/>
+                </a:solidFill>
+                <a:latin typeface="Calibri" pitchFamily="34" charset="0"/>
+                <a:ea typeface="Calibri" pitchFamily="34" charset="-122"/>
+                <a:cs typeface="Calibri" pitchFamily="34" charset="-120"/>
+              </a:rPr>
+              <a:t>Indicadores Socioeconômicos · Unidade 4</a:t>
+            </a:r>
+            <a:endParaRPr lang="en-US" sz="950" dirty="0"/>
+          </a:p>
+        </p:txBody>
+      </p:sp>
+    </p:spTree>
+  </p:cSld>
+  <p:clrMapOvr>
+    <a:masterClrMapping/>
+  </p:clrMapOvr>
+</p:sld>
+</file>
+
 <file path=ppt/slides/slide4.xml><?xml version="1.0" encoding="utf-8"?>
 <p:sld xmlns:a="http://schemas.openxmlformats.org/drawingml/2006/main" xmlns:r="http://schemas.openxmlformats.org/officeDocument/2006/relationships" xmlns:p="http://schemas.openxmlformats.org/presentationml/2006/main">
   <p:cSld name="Slide 4">
@@ -21069,7 +21733,7 @@
                 <a:ea typeface="Calibri" pitchFamily="34" charset="-122"/>
                 <a:cs typeface="Calibri" pitchFamily="34" charset="-120"/>
               </a:rPr>
-              <a:t>Indicadores Socioeconômicos · Unidade 4</a:t>
+              <a:t>Indicadores Socioeconômicos · Unidade 4 · Tópico 7 do sumário</a:t>
             </a:r>
             <a:endParaRPr lang="en-US" sz="950" dirty="0"/>
           </a:p>
@@ -21506,7 +22170,7 @@
                 <a:ea typeface="Calibri" pitchFamily="34" charset="-122"/>
                 <a:cs typeface="Calibri" pitchFamily="34" charset="-120"/>
               </a:rPr>
-              <a:t>Indicadores Socioeconômicos · Unidade 4</a:t>
+              <a:t>Indicadores Socioeconômicos · Unidade 4 · Tópico 7 do sumário</a:t>
             </a:r>
             <a:endParaRPr lang="en-US" sz="950" dirty="0"/>
           </a:p>
@@ -22004,7 +22668,7 @@
                 <a:ea typeface="Calibri" pitchFamily="34" charset="-122"/>
                 <a:cs typeface="Calibri" pitchFamily="34" charset="-120"/>
               </a:rPr>
-              <a:t>Indicadores Socioeconômicos · Unidade 4</a:t>
+              <a:t>Indicadores Socioeconômicos · Unidade 4 · Tópico 7 do sumário</a:t>
             </a:r>
             <a:endParaRPr lang="en-US" sz="950" dirty="0"/>
           </a:p>
@@ -22417,7 +23081,7 @@
                 <a:ea typeface="Calibri" pitchFamily="34" charset="-122"/>
                 <a:cs typeface="Calibri" pitchFamily="34" charset="-120"/>
               </a:rPr>
-              <a:t>Indicadores Socioeconômicos · Unidade 4</a:t>
+              <a:t>Indicadores Socioeconômicos · Unidade 4 · Tópico 7 do sumário</a:t>
             </a:r>
             <a:endParaRPr lang="en-US" sz="950" dirty="0"/>
           </a:p>
@@ -23551,7 +24215,7 @@
                 <a:ea typeface="Calibri" pitchFamily="34" charset="-122"/>
                 <a:cs typeface="Calibri" pitchFamily="34" charset="-120"/>
               </a:rPr>
-              <a:t>Indicadores Socioeconômicos · Unidade 4</a:t>
+              <a:t>Indicadores Socioeconômicos · Unidade 4 · Tópico 7 do sumário</a:t>
             </a:r>
             <a:endParaRPr lang="en-US" sz="950" dirty="0"/>
           </a:p>
@@ -23964,7 +24628,7 @@
                 <a:ea typeface="Calibri" pitchFamily="34" charset="-122"/>
                 <a:cs typeface="Calibri" pitchFamily="34" charset="-120"/>
               </a:rPr>
-              <a:t>Indicadores Socioeconômicos · Unidade 4</a:t>
+              <a:t>Indicadores Socioeconômicos · Unidade 4 · Tópico 7 do sumário</a:t>
             </a:r>
             <a:endParaRPr lang="en-US" sz="950" dirty="0"/>
           </a:p>
